--- a/report/data_cluster/disadvantages_slide.pptx
+++ b/report/data_cluster/disadvantages_slide.pptx
@@ -3487,7 +3487,7 @@
                 </a:solidFill>
                 <a:latin typeface="Garamond"/>
               </a:rPr>
-              <a:t>Less sample. We keep one month per year: ~110–150k adults in the ASEC against about one million basic interviews over the twelve months (~3,700 vs ~11,000 teacher observations a year).</a:t>
+              <a:t>Less sample. The ASEC sees each teacher once a year, ~4,000 in all. The twelve monthly files see ~11,000 distinct teachers, about three times each. We give up two of every three teachers in exchange for the retrospective questions, which only March asks.</a:t>
             </a:r>
           </a:p>
           <a:p>

--- a/report/data_cluster/disadvantages_slide.pptx
+++ b/report/data_cluster/disadvantages_slide.pptx
@@ -3487,7 +3487,7 @@
                 </a:solidFill>
                 <a:latin typeface="Garamond"/>
               </a:rPr>
-              <a:t>Less sample. The ASEC sees each teacher once a year, ~4,000 in all. The twelve monthly files see ~11,000 distinct teachers, about three times each. We give up two of every three teachers in exchange for the retrospective questions, which only March asks.</a:t>
+              <a:t>Less sample. Using only March, we observe ~4,000 teachers a year, once each. Using all twelve months we would observe ~11,000 teachers, three times each — but the retrospective questions that define the leaving rate are only asked in March.</a:t>
             </a:r>
           </a:p>
           <a:p>

--- a/report/data_cluster/disadvantages_slide.pptx
+++ b/report/data_cluster/disadvantages_slide.pptx
@@ -3254,7 +3254,7 @@
                 </a:solidFill>
                 <a:latin typeface="Garamond"/>
               </a:rPr>
-              <a:t>Identity is not certain, validation can admit noisy people.</a:t>
+              <a:t>Individual matching errors: the sex–race–age check discards ~5% of links; a same-profile replacement slipping through is not measurable.</a:t>
             </a:r>
           </a:p>
           <a:p>
@@ -3282,7 +3282,7 @@
                 </a:solidFill>
                 <a:latin typeface="Garamond"/>
               </a:rPr>
-              <a:t>Movers are lost. About 25% of addresses are not found a year later.</a:t>
+              <a:t>Internal migration: ~8% of people move home each year, and a move breaks the address link.</a:t>
             </a:r>
           </a:p>
           <a:p>
@@ -3310,7 +3310,7 @@
                 </a:solidFill>
                 <a:latin typeface="Garamond"/>
               </a:rPr>
-              <a:t>Normal household attrition on top.</a:t>
+              <a:t>Normal survey attrition: 6–9% of due re-interviews are missed each month; ~17% of teachers never reappear in year 2.</a:t>
             </a:r>
           </a:p>
           <a:p>

--- a/report/data_cluster/disadvantages_slide.pptx
+++ b/report/data_cluster/disadvantages_slide.pptx
@@ -3282,7 +3282,7 @@
                 </a:solidFill>
                 <a:latin typeface="Garamond"/>
               </a:rPr>
-              <a:t>Internal migration: ~8% of people move home each year, and a move breaks the address link.</a:t>
+              <a:t>Internal migration: ~8% a year — the address responds but the person has moved (the Census mover rate is 8%).</a:t>
             </a:r>
           </a:p>
           <a:p>
@@ -3310,7 +3310,7 @@
                 </a:solidFill>
                 <a:latin typeface="Garamond"/>
               </a:rPr>
-              <a:t>Normal survey attrition: 6–9% of due re-interviews are missed each month; ~17% of teachers never reappear in year 2.</a:t>
+              <a:t>Normal survey attrition: ~10% a year — the address is due for re-interview but never responds again (7% in 2015, 12% in 2023).</a:t>
             </a:r>
           </a:p>
           <a:p>
